--- a/docs/Quiz.pptx
+++ b/docs/Quiz.pptx
@@ -3373,14 +3373,77 @@
         </p:blipFill>
         <p:spPr>
           <a:xfrm>
-            <a:off x="4599363" y="1932363"/>
-            <a:ext cx="2993274" cy="2993274"/>
+            <a:off x="4222158" y="1555158"/>
+            <a:ext cx="3747683" cy="3747683"/>
           </a:xfrm>
           <a:prstGeom prst="rect">
             <a:avLst/>
           </a:prstGeom>
         </p:spPr>
       </p:pic>
+      <p:sp>
+        <p:nvSpPr>
+          <p:cNvPr id="2" name="Szövegdoboz 1">
+            <a:extLst>
+              <a:ext uri="{FF2B5EF4-FFF2-40B4-BE49-F238E27FC236}">
+                <a16:creationId xmlns:a16="http://schemas.microsoft.com/office/drawing/2014/main" id="{EB3410E6-357C-3F00-F079-66C35A94AB6A}"/>
+              </a:ext>
+            </a:extLst>
+          </p:cNvPr>
+          <p:cNvSpPr txBox="1"/>
+          <p:nvPr/>
+        </p:nvSpPr>
+        <p:spPr>
+          <a:xfrm>
+            <a:off x="4089632" y="6149129"/>
+            <a:ext cx="4012734" cy="646331"/>
+          </a:xfrm>
+          <a:prstGeom prst="rect">
+            <a:avLst/>
+          </a:prstGeom>
+          <a:noFill/>
+        </p:spPr>
+        <p:txBody>
+          <a:bodyPr wrap="square" rtlCol="0">
+            <a:spAutoFit/>
+          </a:bodyPr>
+          <a:lstStyle/>
+          <a:p>
+            <a:r>
+              <a:rPr lang="hu-HU" dirty="0">
+                <a:solidFill>
+                  <a:schemeClr val="bg1"/>
+                </a:solidFill>
+                <a:latin typeface="Franklin Gothic Demi" panose="020B0703020102020204" pitchFamily="34" charset="0"/>
+              </a:rPr>
+              <a:t>Készítette: Holló Levente, </a:t>
+            </a:r>
+            <a:r>
+              <a:rPr lang="hu-HU" dirty="0" err="1">
+                <a:solidFill>
+                  <a:schemeClr val="bg1"/>
+                </a:solidFill>
+                <a:latin typeface="Franklin Gothic Demi" panose="020B0703020102020204" pitchFamily="34" charset="0"/>
+              </a:rPr>
+              <a:t>Mikecz</a:t>
+            </a:r>
+            <a:r>
+              <a:rPr lang="hu-HU" dirty="0">
+                <a:solidFill>
+                  <a:schemeClr val="bg1"/>
+                </a:solidFill>
+                <a:latin typeface="Franklin Gothic Demi" panose="020B0703020102020204" pitchFamily="34" charset="0"/>
+              </a:rPr>
+              <a:t> Lilla </a:t>
+            </a:r>
+          </a:p>
+          <a:p>
+            <a:endParaRPr lang="hu-HU" dirty="0">
+              <a:latin typeface="Comic Sans MS" panose="030F0702030302020204" pitchFamily="66" charset="0"/>
+            </a:endParaRPr>
+          </a:p>
+        </p:txBody>
+      </p:sp>
     </p:spTree>
     <p:extLst>
       <p:ext uri="{BB962C8B-B14F-4D97-AF65-F5344CB8AC3E}">
@@ -3734,6 +3797,38 @@
           </a:p>
         </p:txBody>
       </p:sp>
+      <p:pic>
+        <p:nvPicPr>
+          <p:cNvPr id="8" name="Kép 7">
+            <a:extLst>
+              <a:ext uri="{FF2B5EF4-FFF2-40B4-BE49-F238E27FC236}">
+                <a16:creationId xmlns:a16="http://schemas.microsoft.com/office/drawing/2014/main" id="{50651623-5CD8-BEDB-4684-1B5EDC7213C4}"/>
+              </a:ext>
+            </a:extLst>
+          </p:cNvPr>
+          <p:cNvPicPr>
+            <a:picLocks noChangeAspect="1"/>
+          </p:cNvPicPr>
+          <p:nvPr/>
+        </p:nvPicPr>
+        <p:blipFill>
+          <a:blip r:embed="rId4"/>
+          <a:stretch>
+            <a:fillRect/>
+          </a:stretch>
+        </p:blipFill>
+        <p:spPr>
+          <a:xfrm>
+            <a:off x="6096000" y="948063"/>
+            <a:ext cx="4381947" cy="4955016"/>
+          </a:xfrm>
+          <a:prstGeom prst="roundRect">
+            <a:avLst>
+              <a:gd name="adj" fmla="val 1155"/>
+            </a:avLst>
+          </a:prstGeom>
+        </p:spPr>
+      </p:pic>
     </p:spTree>
     <p:extLst>
       <p:ext uri="{BB962C8B-B14F-4D97-AF65-F5344CB8AC3E}">
@@ -4072,6 +4167,76 @@
           </a:p>
         </p:txBody>
       </p:sp>
+      <p:pic>
+        <p:nvPicPr>
+          <p:cNvPr id="6" name="Kép 5">
+            <a:extLst>
+              <a:ext uri="{FF2B5EF4-FFF2-40B4-BE49-F238E27FC236}">
+                <a16:creationId xmlns:a16="http://schemas.microsoft.com/office/drawing/2014/main" id="{FAA96760-0969-3BBB-0A7A-7434C2C33D17}"/>
+              </a:ext>
+            </a:extLst>
+          </p:cNvPr>
+          <p:cNvPicPr>
+            <a:picLocks noChangeAspect="1"/>
+          </p:cNvPicPr>
+          <p:nvPr/>
+        </p:nvPicPr>
+        <p:blipFill>
+          <a:blip r:embed="rId4">
+            <a:extLst>
+              <a:ext uri="{28A0092B-C50C-407E-A947-70E740481C1C}">
+                <a14:useLocalDpi xmlns:a14="http://schemas.microsoft.com/office/drawing/2010/main" val="0"/>
+              </a:ext>
+            </a:extLst>
+          </a:blip>
+          <a:stretch>
+            <a:fillRect/>
+          </a:stretch>
+        </p:blipFill>
+        <p:spPr>
+          <a:xfrm>
+            <a:off x="7503059" y="942847"/>
+            <a:ext cx="2258022" cy="4972305"/>
+          </a:xfrm>
+          <a:prstGeom prst="roundRect">
+            <a:avLst>
+              <a:gd name="adj" fmla="val 1155"/>
+            </a:avLst>
+          </a:prstGeom>
+        </p:spPr>
+      </p:pic>
+      <p:pic>
+        <p:nvPicPr>
+          <p:cNvPr id="8" name="Kép 7">
+            <a:extLst>
+              <a:ext uri="{FF2B5EF4-FFF2-40B4-BE49-F238E27FC236}">
+                <a16:creationId xmlns:a16="http://schemas.microsoft.com/office/drawing/2014/main" id="{28EF1FA2-F0B5-C202-8FEF-1DE7CF2A2A0E}"/>
+              </a:ext>
+            </a:extLst>
+          </p:cNvPr>
+          <p:cNvPicPr>
+            <a:picLocks noChangeAspect="1"/>
+          </p:cNvPicPr>
+          <p:nvPr/>
+        </p:nvPicPr>
+        <p:blipFill>
+          <a:blip r:embed="rId5"/>
+          <a:stretch>
+            <a:fillRect/>
+          </a:stretch>
+        </p:blipFill>
+        <p:spPr>
+          <a:xfrm>
+            <a:off x="895944" y="3095739"/>
+            <a:ext cx="4003766" cy="3315220"/>
+          </a:xfrm>
+          <a:prstGeom prst="roundRect">
+            <a:avLst>
+              <a:gd name="adj" fmla="val 1155"/>
+            </a:avLst>
+          </a:prstGeom>
+        </p:spPr>
+      </p:pic>
     </p:spTree>
     <p:extLst>
       <p:ext uri="{BB962C8B-B14F-4D97-AF65-F5344CB8AC3E}">
@@ -4536,6 +4701,73 @@
           </a:p>
         </p:txBody>
       </p:sp>
+      <p:pic>
+        <p:nvPicPr>
+          <p:cNvPr id="4" name="Kép 3">
+            <a:extLst>
+              <a:ext uri="{FF2B5EF4-FFF2-40B4-BE49-F238E27FC236}">
+                <a16:creationId xmlns:a16="http://schemas.microsoft.com/office/drawing/2014/main" id="{AD845140-F5BF-2E8F-9400-4E7D987F4596}"/>
+              </a:ext>
+            </a:extLst>
+          </p:cNvPr>
+          <p:cNvPicPr>
+            <a:picLocks noChangeAspect="1"/>
+          </p:cNvPicPr>
+          <p:nvPr/>
+        </p:nvPicPr>
+        <p:blipFill>
+          <a:blip r:embed="rId4"/>
+          <a:stretch>
+            <a:fillRect/>
+          </a:stretch>
+        </p:blipFill>
+        <p:spPr>
+          <a:xfrm>
+            <a:off x="5922627" y="1809495"/>
+            <a:ext cx="4981876" cy="1355776"/>
+          </a:xfrm>
+          <a:prstGeom prst="roundRect">
+            <a:avLst>
+              <a:gd name="adj" fmla="val 5656"/>
+            </a:avLst>
+          </a:prstGeom>
+          <a:effectLst>
+            <a:softEdge rad="0"/>
+          </a:effectLst>
+        </p:spPr>
+      </p:pic>
+      <p:pic>
+        <p:nvPicPr>
+          <p:cNvPr id="6" name="Kép 5">
+            <a:extLst>
+              <a:ext uri="{FF2B5EF4-FFF2-40B4-BE49-F238E27FC236}">
+                <a16:creationId xmlns:a16="http://schemas.microsoft.com/office/drawing/2014/main" id="{6C596C42-4660-DB2B-B41C-1F94D0AFAAD2}"/>
+              </a:ext>
+            </a:extLst>
+          </p:cNvPr>
+          <p:cNvPicPr>
+            <a:picLocks noChangeAspect="1"/>
+          </p:cNvPicPr>
+          <p:nvPr/>
+        </p:nvPicPr>
+        <p:blipFill>
+          <a:blip r:embed="rId5"/>
+          <a:stretch>
+            <a:fillRect/>
+          </a:stretch>
+        </p:blipFill>
+        <p:spPr>
+          <a:xfrm>
+            <a:off x="5922627" y="3839057"/>
+            <a:ext cx="4981876" cy="1677979"/>
+          </a:xfrm>
+          <a:prstGeom prst="roundRect">
+            <a:avLst>
+              <a:gd name="adj" fmla="val 7770"/>
+            </a:avLst>
+          </a:prstGeom>
+        </p:spPr>
+      </p:pic>
     </p:spTree>
     <p:extLst>
       <p:ext uri="{BB962C8B-B14F-4D97-AF65-F5344CB8AC3E}">
@@ -4871,6 +5103,38 @@
           </a:xfrm>
           <a:prstGeom prst="rect">
             <a:avLst/>
+          </a:prstGeom>
+        </p:spPr>
+      </p:pic>
+      <p:pic>
+        <p:nvPicPr>
+          <p:cNvPr id="4" name="Kép 3">
+            <a:extLst>
+              <a:ext uri="{FF2B5EF4-FFF2-40B4-BE49-F238E27FC236}">
+                <a16:creationId xmlns:a16="http://schemas.microsoft.com/office/drawing/2014/main" id="{9304EF34-9077-5575-838E-17A9377E82D3}"/>
+              </a:ext>
+            </a:extLst>
+          </p:cNvPr>
+          <p:cNvPicPr>
+            <a:picLocks noChangeAspect="1"/>
+          </p:cNvPicPr>
+          <p:nvPr/>
+        </p:nvPicPr>
+        <p:blipFill>
+          <a:blip r:embed="rId4"/>
+          <a:stretch>
+            <a:fillRect/>
+          </a:stretch>
+        </p:blipFill>
+        <p:spPr>
+          <a:xfrm>
+            <a:off x="6418471" y="1166018"/>
+            <a:ext cx="3515216" cy="4525964"/>
+          </a:xfrm>
+          <a:prstGeom prst="roundRect">
+            <a:avLst>
+              <a:gd name="adj" fmla="val 1155"/>
+            </a:avLst>
           </a:prstGeom>
         </p:spPr>
       </p:pic>
@@ -5221,6 +5485,38 @@
           </a:prstGeom>
         </p:spPr>
       </p:pic>
+      <p:pic>
+        <p:nvPicPr>
+          <p:cNvPr id="4" name="Kép 3">
+            <a:extLst>
+              <a:ext uri="{FF2B5EF4-FFF2-40B4-BE49-F238E27FC236}">
+                <a16:creationId xmlns:a16="http://schemas.microsoft.com/office/drawing/2014/main" id="{5FF992E5-CDC8-3EF8-1866-2A963454D322}"/>
+              </a:ext>
+            </a:extLst>
+          </p:cNvPr>
+          <p:cNvPicPr>
+            <a:picLocks noChangeAspect="1"/>
+          </p:cNvPicPr>
+          <p:nvPr/>
+        </p:nvPicPr>
+        <p:blipFill>
+          <a:blip r:embed="rId4"/>
+          <a:stretch>
+            <a:fillRect/>
+          </a:stretch>
+        </p:blipFill>
+        <p:spPr>
+          <a:xfrm>
+            <a:off x="5075284" y="1550915"/>
+            <a:ext cx="6132522" cy="3756170"/>
+          </a:xfrm>
+          <a:prstGeom prst="roundRect">
+            <a:avLst>
+              <a:gd name="adj" fmla="val 1155"/>
+            </a:avLst>
+          </a:prstGeom>
+        </p:spPr>
+      </p:pic>
     </p:spTree>
     <p:extLst>
       <p:ext uri="{BB962C8B-B14F-4D97-AF65-F5344CB8AC3E}">
@@ -5605,6 +5901,74 @@
           </a:p>
         </p:txBody>
       </p:sp>
+      <p:sp>
+        <p:nvSpPr>
+          <p:cNvPr id="5" name="Szövegdoboz 4">
+            <a:extLst>
+              <a:ext uri="{FF2B5EF4-FFF2-40B4-BE49-F238E27FC236}">
+                <a16:creationId xmlns:a16="http://schemas.microsoft.com/office/drawing/2014/main" id="{21B92B67-433B-C79C-1804-A0CD93C97C03}"/>
+              </a:ext>
+            </a:extLst>
+          </p:cNvPr>
+          <p:cNvSpPr txBox="1"/>
+          <p:nvPr/>
+        </p:nvSpPr>
+        <p:spPr>
+          <a:xfrm>
+            <a:off x="3047301" y="3246431"/>
+            <a:ext cx="6094602" cy="369332"/>
+          </a:xfrm>
+          <a:prstGeom prst="rect">
+            <a:avLst/>
+          </a:prstGeom>
+          <a:noFill/>
+        </p:spPr>
+        <p:txBody>
+          <a:bodyPr wrap="square">
+            <a:spAutoFit/>
+          </a:bodyPr>
+          <a:lstStyle/>
+          <a:p>
+            <a:endParaRPr lang="hu-HU" dirty="0"/>
+          </a:p>
+        </p:txBody>
+      </p:sp>
+      <p:pic>
+        <p:nvPicPr>
+          <p:cNvPr id="10" name="Kép 9">
+            <a:extLst>
+              <a:ext uri="{FF2B5EF4-FFF2-40B4-BE49-F238E27FC236}">
+                <a16:creationId xmlns:a16="http://schemas.microsoft.com/office/drawing/2014/main" id="{9EB48F09-914B-735C-39BA-3C41AA6EA67B}"/>
+              </a:ext>
+            </a:extLst>
+          </p:cNvPr>
+          <p:cNvPicPr>
+            <a:picLocks noChangeAspect="1"/>
+          </p:cNvPicPr>
+          <p:nvPr/>
+        </p:nvPicPr>
+        <p:blipFill>
+          <a:blip r:embed="rId4">
+            <a:extLst>
+              <a:ext uri="{28A0092B-C50C-407E-A947-70E740481C1C}">
+                <a14:useLocalDpi xmlns:a14="http://schemas.microsoft.com/office/drawing/2010/main" val="0"/>
+              </a:ext>
+            </a:extLst>
+          </a:blip>
+          <a:stretch>
+            <a:fillRect/>
+          </a:stretch>
+        </p:blipFill>
+        <p:spPr>
+          <a:xfrm>
+            <a:off x="5485124" y="927172"/>
+            <a:ext cx="4761905" cy="4761905"/>
+          </a:xfrm>
+          <a:prstGeom prst="rect">
+            <a:avLst/>
+          </a:prstGeom>
+        </p:spPr>
+      </p:pic>
     </p:spTree>
     <p:extLst>
       <p:ext uri="{BB962C8B-B14F-4D97-AF65-F5344CB8AC3E}">
@@ -5996,8 +6360,10 @@
             <a:off x="5258635" y="1677028"/>
             <a:ext cx="6144802" cy="3503944"/>
           </a:xfrm>
-          <a:prstGeom prst="rect">
-            <a:avLst/>
+          <a:prstGeom prst="roundRect">
+            <a:avLst>
+              <a:gd name="adj" fmla="val 1155"/>
+            </a:avLst>
           </a:prstGeom>
         </p:spPr>
       </p:pic>
@@ -6386,8 +6752,10 @@
             <a:off x="5296692" y="1675860"/>
             <a:ext cx="6052516" cy="3505112"/>
           </a:xfrm>
-          <a:prstGeom prst="rect">
-            <a:avLst/>
+          <a:prstGeom prst="roundRect">
+            <a:avLst>
+              <a:gd name="adj" fmla="val 1155"/>
+            </a:avLst>
           </a:prstGeom>
         </p:spPr>
       </p:pic>
@@ -6776,8 +7144,10 @@
             <a:off x="5723825" y="1675177"/>
             <a:ext cx="5198248" cy="3505795"/>
           </a:xfrm>
-          <a:prstGeom prst="rect">
-            <a:avLst/>
+          <a:prstGeom prst="roundRect">
+            <a:avLst>
+              <a:gd name="adj" fmla="val 1155"/>
+            </a:avLst>
           </a:prstGeom>
         </p:spPr>
       </p:pic>
@@ -7141,6 +7511,44 @@
           </a:p>
         </p:txBody>
       </p:sp>
+      <p:pic>
+        <p:nvPicPr>
+          <p:cNvPr id="5" name="Kép 4">
+            <a:extLst>
+              <a:ext uri="{FF2B5EF4-FFF2-40B4-BE49-F238E27FC236}">
+                <a16:creationId xmlns:a16="http://schemas.microsoft.com/office/drawing/2014/main" id="{FA86CD5C-2047-5B41-77D9-DFC6C89BB137}"/>
+              </a:ext>
+            </a:extLst>
+          </p:cNvPr>
+          <p:cNvPicPr>
+            <a:picLocks noChangeAspect="1"/>
+          </p:cNvPicPr>
+          <p:nvPr/>
+        </p:nvPicPr>
+        <p:blipFill>
+          <a:blip r:embed="rId4">
+            <a:extLst>
+              <a:ext uri="{28A0092B-C50C-407E-A947-70E740481C1C}">
+                <a14:useLocalDpi xmlns:a14="http://schemas.microsoft.com/office/drawing/2010/main" val="0"/>
+              </a:ext>
+            </a:extLst>
+          </a:blip>
+          <a:stretch>
+            <a:fillRect/>
+          </a:stretch>
+        </p:blipFill>
+        <p:spPr>
+          <a:xfrm>
+            <a:off x="6529732" y="953069"/>
+            <a:ext cx="3708537" cy="4950010"/>
+          </a:xfrm>
+          <a:prstGeom prst="roundRect">
+            <a:avLst>
+              <a:gd name="adj" fmla="val 1155"/>
+            </a:avLst>
+          </a:prstGeom>
+        </p:spPr>
+      </p:pic>
     </p:spTree>
     <p:extLst>
       <p:ext uri="{BB962C8B-B14F-4D97-AF65-F5344CB8AC3E}">
